--- a/docs/workshop/WMDG-Praesentationsvorlage.pptx
+++ b/docs/workshop/WMDG-Praesentationsvorlage.pptx
@@ -3661,7 +3661,7 @@
         </p:blipFill>
         <p:spPr>
           <a:xfrm>
-            <a:off x="777240" y="777240"/>
+            <a:off x="777240" y="685800"/>
             <a:ext cx="1371600" cy="1371600"/>
           </a:xfrm>
           <a:prstGeom prst="rect">
@@ -3677,7 +3677,7 @@
         </p:nvSpPr>
         <p:spPr>
           <a:xfrm>
-            <a:off x="777240" y="777240"/>
+            <a:off x="777240" y="685800"/>
             <a:ext cx="1371600" cy="1371600"/>
           </a:xfrm>
           <a:prstGeom prst="rect">
@@ -3716,7 +3716,7 @@
         </p:nvSpPr>
         <p:spPr>
           <a:xfrm>
-            <a:off x="2423160" y="868680"/>
+            <a:off x="2423160" y="640080"/>
             <a:ext cx="7315200" cy="365760"/>
           </a:xfrm>
           <a:prstGeom prst="rect">
@@ -3755,7 +3755,7 @@
         </p:nvSpPr>
         <p:spPr>
           <a:xfrm>
-            <a:off x="2377440" y="1188720"/>
+            <a:off x="2377440" y="960120"/>
             <a:ext cx="8961120" cy="822960"/>
           </a:xfrm>
           <a:prstGeom prst="rect">
@@ -3794,7 +3794,7 @@
         </p:nvSpPr>
         <p:spPr>
           <a:xfrm>
-            <a:off x="2395728" y="2011680"/>
+            <a:off x="2395728" y="1828800"/>
             <a:ext cx="8961120" cy="457200"/>
           </a:xfrm>
           <a:prstGeom prst="rect">
